--- a/프로젝트발표/자바은행.pptx
+++ b/프로젝트발표/자바은행.pptx
@@ -4665,13 +4665,13 @@
   <p:clrMapOvr>
     <a:masterClrMapping/>
   </p:clrMapOvr>
-  <mc:AlternateContent xmlns:mc="http://schemas.openxmlformats.org/markup-compatibility/2006">
-    <mc:Choice xmlns:p159="http://schemas.microsoft.com/office/powerpoint/2015/09/main" Requires="p159">
+  <mc:AlternateContent xmlns:mc="http://schemas.openxmlformats.org/markup-compatibility/2006" xmlns:p159="http://schemas.microsoft.com/office/powerpoint/2015/09/main">
+    <mc:Choice Requires="p159">
       <p:transition xmlns:p14="http://schemas.microsoft.com/office/powerpoint/2010/main" spd="slow" p14:dur="1500" advClick="0" advTm="1000">
         <p159:morph option="byObject"/>
       </p:transition>
     </mc:Choice>
-    <mc:Fallback>
+    <mc:Fallback xmlns="">
       <p:transition spd="slow" advClick="0" advTm="1000">
         <p:fade/>
       </p:transition>
@@ -12506,13 +12506,13 @@
   <p:clrMapOvr>
     <a:masterClrMapping/>
   </p:clrMapOvr>
-  <mc:AlternateContent xmlns:mc="http://schemas.openxmlformats.org/markup-compatibility/2006">
-    <mc:Choice xmlns:p159="http://schemas.microsoft.com/office/powerpoint/2015/09/main" Requires="p159">
+  <mc:AlternateContent xmlns:mc="http://schemas.openxmlformats.org/markup-compatibility/2006" xmlns:p159="http://schemas.microsoft.com/office/powerpoint/2015/09/main">
+    <mc:Choice Requires="p159">
       <p:transition xmlns:p14="http://schemas.microsoft.com/office/powerpoint/2010/main" spd="slow" p14:dur="1500">
         <p159:morph option="byObject"/>
       </p:transition>
     </mc:Choice>
-    <mc:Fallback>
+    <mc:Fallback xmlns="">
       <p:transition spd="slow">
         <p:fade/>
       </p:transition>
@@ -22191,13 +22191,13 @@
   <p:clrMapOvr>
     <a:masterClrMapping/>
   </p:clrMapOvr>
-  <mc:AlternateContent xmlns:mc="http://schemas.openxmlformats.org/markup-compatibility/2006">
-    <mc:Choice xmlns:p159="http://schemas.microsoft.com/office/powerpoint/2015/09/main" Requires="p159">
+  <mc:AlternateContent xmlns:mc="http://schemas.openxmlformats.org/markup-compatibility/2006" xmlns:p159="http://schemas.microsoft.com/office/powerpoint/2015/09/main">
+    <mc:Choice Requires="p159">
       <p:transition xmlns:p14="http://schemas.microsoft.com/office/powerpoint/2010/main" spd="slow" p14:dur="2000">
         <p159:morph option="byObject"/>
       </p:transition>
     </mc:Choice>
-    <mc:Fallback>
+    <mc:Fallback xmlns="">
       <p:transition spd="slow">
         <p:fade/>
       </p:transition>
@@ -42378,8 +42378,8 @@
         </p:nvSpPr>
         <p:spPr>
           <a:xfrm>
-            <a:off x="2443275" y="1459230"/>
-            <a:ext cx="7305450" cy="3939540"/>
+            <a:off x="2443275" y="1997839"/>
+            <a:ext cx="7305450" cy="2862322"/>
           </a:xfrm>
           <a:prstGeom prst="rect">
             <a:avLst/>
@@ -42394,7 +42394,7 @@
           <a:p>
             <a:pPr algn="ctr"/>
             <a:r>
-              <a:rPr lang="ko-KR" altLang="en-US" sz="25000" dirty="0">
+              <a:rPr lang="ko-KR" altLang="en-US" sz="18000" dirty="0">
                 <a:latin typeface="+mj-lt"/>
               </a:rPr>
               <a:t>시연</a:t>
@@ -43315,13 +43315,13 @@
   <p:clrMapOvr>
     <a:masterClrMapping/>
   </p:clrMapOvr>
-  <mc:AlternateContent xmlns:mc="http://schemas.openxmlformats.org/markup-compatibility/2006">
-    <mc:Choice xmlns:p159="http://schemas.microsoft.com/office/powerpoint/2015/09/main" Requires="p159">
+  <mc:AlternateContent xmlns:mc="http://schemas.openxmlformats.org/markup-compatibility/2006" xmlns:p159="http://schemas.microsoft.com/office/powerpoint/2015/09/main">
+    <mc:Choice Requires="p159">
       <p:transition xmlns:p14="http://schemas.microsoft.com/office/powerpoint/2010/main" spd="slow" p14:dur="2000">
         <p159:morph option="byObject"/>
       </p:transition>
     </mc:Choice>
-    <mc:Fallback>
+    <mc:Fallback xmlns="">
       <p:transition spd="slow">
         <p:fade/>
       </p:transition>
@@ -44235,7 +44235,7 @@
         <p:spPr>
           <a:xfrm>
             <a:off x="328246" y="377952"/>
-            <a:ext cx="1053745" cy="584775"/>
+            <a:ext cx="7184381" cy="584775"/>
           </a:xfrm>
           <a:prstGeom prst="rect">
             <a:avLst/>
@@ -44252,44 +44252,29 @@
               <a:rPr lang="ko-KR" altLang="en-US" sz="3200" dirty="0">
                 <a:latin typeface="+mj-lt"/>
               </a:rPr>
-              <a:t>후기</a:t>
-            </a:r>
-          </a:p>
-        </p:txBody>
-      </p:sp>
-      <p:sp>
-        <p:nvSpPr>
-          <p:cNvPr id="4" name="TextBox 3">
-            <a:extLst>
-              <a:ext uri="{FF2B5EF4-FFF2-40B4-BE49-F238E27FC236}">
-                <a16:creationId xmlns:a16="http://schemas.microsoft.com/office/drawing/2014/main" id="{A36E6077-879B-A96B-C207-441D3CC093AF}"/>
-              </a:ext>
-            </a:extLst>
-          </p:cNvPr>
-          <p:cNvSpPr txBox="1"/>
-          <p:nvPr/>
-        </p:nvSpPr>
-        <p:spPr>
-          <a:xfrm>
-            <a:off x="468922" y="945115"/>
-            <a:ext cx="1401442" cy="369332"/>
-          </a:xfrm>
-          <a:prstGeom prst="rect">
-            <a:avLst/>
-          </a:prstGeom>
-          <a:noFill/>
-        </p:spPr>
-        <p:txBody>
-          <a:bodyPr wrap="square" rtlCol="0">
-            <a:spAutoFit/>
-          </a:bodyPr>
-          <a:lstStyle/>
-          <a:p>
-            <a:r>
-              <a:rPr lang="ko-KR" altLang="en-US"/>
+              <a:t>후기 </a:t>
+            </a:r>
+            <a:r>
+              <a:rPr lang="en-US" altLang="ko-KR" sz="3200" dirty="0">
+                <a:latin typeface="+mj-lt"/>
+              </a:rPr>
+              <a:t>– </a:t>
+            </a:r>
+            <a:r>
+              <a:rPr lang="ko-KR" altLang="en-US" sz="3200" dirty="0">
+                <a:latin typeface="+mj-lt"/>
+              </a:rPr>
               <a:t>개인별 후기</a:t>
             </a:r>
-            <a:endParaRPr lang="ko-KR" altLang="en-US" dirty="0"/>
+            <a:r>
+              <a:rPr lang="en-US" altLang="ko-KR" sz="3200" dirty="0">
+                <a:latin typeface="+mj-lt"/>
+              </a:rPr>
+              <a:t> </a:t>
+            </a:r>
+            <a:endParaRPr lang="ko-KR" altLang="en-US" sz="3200" dirty="0">
+              <a:latin typeface="+mj-lt"/>
+            </a:endParaRPr>
           </a:p>
         </p:txBody>
       </p:sp>
@@ -44308,14 +44293,14 @@
           <p:nvPr>
             <p:extLst>
               <p:ext uri="{D42A27DB-BD31-4B8C-83A1-F6EECF244321}">
-                <p14:modId xmlns:p14="http://schemas.microsoft.com/office/powerpoint/2010/main" val="1306884768"/>
+                <p14:modId xmlns:p14="http://schemas.microsoft.com/office/powerpoint/2010/main" val="1628775310"/>
               </p:ext>
             </p:extLst>
           </p:nvPr>
         </p:nvGraphicFramePr>
         <p:xfrm>
-          <a:off x="614218" y="1385671"/>
-          <a:ext cx="10963563" cy="5094377"/>
+          <a:off x="614218" y="962727"/>
+          <a:ext cx="10963563" cy="5773664"/>
         </p:xfrm>
         <a:graphic>
           <a:graphicData uri="http://schemas.openxmlformats.org/drawingml/2006/table">
@@ -44339,7 +44324,7 @@
                   </a:extLst>
                 </a:gridCol>
               </a:tblGrid>
-              <a:tr h="1204562">
+              <a:tr h="817599">
                 <a:tc>
                   <a:txBody>
                     <a:bodyPr/>
@@ -44481,7 +44466,7 @@
                   </a:ext>
                 </a:extLst>
               </a:tr>
-              <a:tr h="1261199">
+              <a:tr h="881230">
                 <a:tc>
                   <a:txBody>
                     <a:bodyPr/>
@@ -44639,7 +44624,7 @@
                   </a:ext>
                 </a:extLst>
               </a:tr>
-              <a:tr h="1424054">
+              <a:tr h="1372396">
                 <a:tc>
                   <a:txBody>
                     <a:bodyPr/>
@@ -44803,7 +44788,7 @@
                   </a:ext>
                 </a:extLst>
               </a:tr>
-              <a:tr h="1204562">
+              <a:tr h="2702439">
                 <a:tc>
                   <a:txBody>
                     <a:bodyPr/>
@@ -44883,11 +44868,381 @@
                     <a:bodyPr/>
                     <a:lstStyle/>
                     <a:p>
-                      <a:pPr algn="ctr" latinLnBrk="1"/>
-                      <a:endParaRPr lang="ko-KR" altLang="en-US" dirty="0">
-                        <a:latin typeface="+mn-ea"/>
-                        <a:ea typeface="+mn-ea"/>
-                      </a:endParaRPr>
+                      <a:r>
+                        <a:rPr lang="ko-KR" altLang="en-US" sz="1600" b="0" i="0" kern="1200" dirty="0">
+                          <a:solidFill>
+                            <a:schemeClr val="dk1"/>
+                          </a:solidFill>
+                          <a:effectLst/>
+                          <a:latin typeface="+mn-lt"/>
+                          <a:ea typeface="+mn-ea"/>
+                          <a:cs typeface="+mn-cs"/>
+                        </a:rPr>
+                        <a:t>자바를 처음 배우면서 진행한 첫 팀 프로젝트라서 많이 어렵고 낯설었다</a:t>
+                      </a:r>
+                      <a:r>
+                        <a:rPr lang="en-US" altLang="ko-KR" sz="1600" b="0" i="0" kern="1200" dirty="0">
+                          <a:solidFill>
+                            <a:schemeClr val="dk1"/>
+                          </a:solidFill>
+                          <a:effectLst/>
+                          <a:latin typeface="+mn-lt"/>
+                          <a:ea typeface="+mn-ea"/>
+                          <a:cs typeface="+mn-cs"/>
+                        </a:rPr>
+                        <a:t>.</a:t>
+                      </a:r>
+                      <a:br>
+                        <a:rPr lang="en-US" altLang="ko-KR" sz="1600" b="0" i="0" kern="1200" dirty="0">
+                          <a:solidFill>
+                            <a:schemeClr val="dk1"/>
+                          </a:solidFill>
+                          <a:effectLst/>
+                          <a:latin typeface="+mn-lt"/>
+                          <a:ea typeface="+mn-ea"/>
+                          <a:cs typeface="+mn-cs"/>
+                        </a:rPr>
+                      </a:br>
+                      <a:r>
+                        <a:rPr lang="ko-KR" altLang="en-US" sz="1600" b="0" i="0" kern="1200" dirty="0">
+                          <a:solidFill>
+                            <a:schemeClr val="dk1"/>
+                          </a:solidFill>
+                          <a:effectLst/>
+                          <a:latin typeface="+mn-lt"/>
+                          <a:ea typeface="+mn-ea"/>
+                          <a:cs typeface="+mn-cs"/>
+                        </a:rPr>
+                        <a:t>하지만 팀원들과 함께 헷갈리거나 모르는 부분을 해결해 나가고</a:t>
+                      </a:r>
+                      <a:r>
+                        <a:rPr lang="en-US" altLang="ko-KR" sz="1600" b="0" i="0" kern="1200" dirty="0">
+                          <a:solidFill>
+                            <a:schemeClr val="dk1"/>
+                          </a:solidFill>
+                          <a:effectLst/>
+                          <a:latin typeface="+mn-lt"/>
+                          <a:ea typeface="+mn-ea"/>
+                          <a:cs typeface="+mn-cs"/>
+                        </a:rPr>
+                        <a:t>, </a:t>
+                      </a:r>
+                      <a:r>
+                        <a:rPr lang="ko-KR" altLang="en-US" sz="1600" b="0" i="0" kern="1200" dirty="0">
+                          <a:solidFill>
+                            <a:schemeClr val="dk1"/>
+                          </a:solidFill>
+                          <a:effectLst/>
+                          <a:latin typeface="+mn-lt"/>
+                          <a:ea typeface="+mn-ea"/>
+                          <a:cs typeface="+mn-cs"/>
+                        </a:rPr>
+                        <a:t>직접 실행해 보면서 내가 구현하고자 한 기능들을 하나하나 완성해 나갈 수 있었다</a:t>
+                      </a:r>
+                      <a:r>
+                        <a:rPr lang="en-US" altLang="ko-KR" sz="1600" b="0" i="0" kern="1200" dirty="0">
+                          <a:solidFill>
+                            <a:schemeClr val="dk1"/>
+                          </a:solidFill>
+                          <a:effectLst/>
+                          <a:latin typeface="+mn-lt"/>
+                          <a:ea typeface="+mn-ea"/>
+                          <a:cs typeface="+mn-cs"/>
+                        </a:rPr>
+                        <a:t>. </a:t>
+                      </a:r>
+                      <a:r>
+                        <a:rPr lang="ko-KR" altLang="en-US" sz="1600" b="0" i="0" kern="1200" dirty="0">
+                          <a:solidFill>
+                            <a:schemeClr val="dk1"/>
+                          </a:solidFill>
+                          <a:effectLst/>
+                          <a:latin typeface="+mn-lt"/>
+                          <a:ea typeface="+mn-ea"/>
+                          <a:cs typeface="+mn-cs"/>
+                        </a:rPr>
+                        <a:t>그 결과 최종적으로 프로젝트를 마무리할 수 있어 뿌듯했고</a:t>
+                      </a:r>
+                      <a:r>
+                        <a:rPr lang="en-US" altLang="ko-KR" sz="1600" b="0" i="0" kern="1200" dirty="0">
+                          <a:solidFill>
+                            <a:schemeClr val="dk1"/>
+                          </a:solidFill>
+                          <a:effectLst/>
+                          <a:latin typeface="+mn-lt"/>
+                          <a:ea typeface="+mn-ea"/>
+                          <a:cs typeface="+mn-cs"/>
+                        </a:rPr>
+                        <a:t>, </a:t>
+                      </a:r>
+                      <a:r>
+                        <a:rPr lang="ko-KR" altLang="en-US" sz="1600" b="0" i="0" kern="1200" dirty="0">
+                          <a:solidFill>
+                            <a:schemeClr val="dk1"/>
+                          </a:solidFill>
+                          <a:effectLst/>
+                          <a:latin typeface="+mn-lt"/>
+                          <a:ea typeface="+mn-ea"/>
+                          <a:cs typeface="+mn-cs"/>
+                        </a:rPr>
+                        <a:t>스스로 더 발전하고 성장할 수 있는 시간이었다고 느껴 뜻깊은 경험이었다</a:t>
+                      </a:r>
+                      <a:r>
+                        <a:rPr lang="en-US" altLang="ko-KR" sz="1600" b="0" i="0" kern="1200" dirty="0">
+                          <a:solidFill>
+                            <a:schemeClr val="dk1"/>
+                          </a:solidFill>
+                          <a:effectLst/>
+                          <a:latin typeface="+mn-lt"/>
+                          <a:ea typeface="+mn-ea"/>
+                          <a:cs typeface="+mn-cs"/>
+                        </a:rPr>
+                        <a:t>.</a:t>
+                      </a:r>
+                    </a:p>
+                    <a:p>
+                      <a:r>
+                        <a:rPr lang="ko-KR" altLang="en-US" sz="1600" b="0" i="0" kern="1200" dirty="0">
+                          <a:solidFill>
+                            <a:schemeClr val="dk1"/>
+                          </a:solidFill>
+                          <a:effectLst/>
+                          <a:latin typeface="+mn-lt"/>
+                          <a:ea typeface="+mn-ea"/>
+                          <a:cs typeface="+mn-cs"/>
+                        </a:rPr>
+                        <a:t>클래스</a:t>
+                      </a:r>
+                      <a:r>
+                        <a:rPr lang="en-US" altLang="ko-KR" sz="1600" b="0" i="0" kern="1200" dirty="0">
+                          <a:solidFill>
+                            <a:schemeClr val="dk1"/>
+                          </a:solidFill>
+                          <a:effectLst/>
+                          <a:latin typeface="+mn-lt"/>
+                          <a:ea typeface="+mn-ea"/>
+                          <a:cs typeface="+mn-cs"/>
+                        </a:rPr>
+                        <a:t>, </a:t>
+                      </a:r>
+                      <a:r>
+                        <a:rPr lang="ko-KR" altLang="en-US" sz="1600" b="0" i="0" kern="1200" dirty="0">
+                          <a:solidFill>
+                            <a:schemeClr val="dk1"/>
+                          </a:solidFill>
+                          <a:effectLst/>
+                          <a:latin typeface="+mn-lt"/>
+                          <a:ea typeface="+mn-ea"/>
+                          <a:cs typeface="+mn-cs"/>
+                        </a:rPr>
+                        <a:t>객체</a:t>
+                      </a:r>
+                      <a:r>
+                        <a:rPr lang="en-US" altLang="ko-KR" sz="1600" b="0" i="0" kern="1200" dirty="0">
+                          <a:solidFill>
+                            <a:schemeClr val="dk1"/>
+                          </a:solidFill>
+                          <a:effectLst/>
+                          <a:latin typeface="+mn-lt"/>
+                          <a:ea typeface="+mn-ea"/>
+                          <a:cs typeface="+mn-cs"/>
+                        </a:rPr>
+                        <a:t>, </a:t>
+                      </a:r>
+                      <a:r>
+                        <a:rPr lang="ko-KR" altLang="en-US" sz="1600" b="0" i="0" kern="1200" dirty="0">
+                          <a:solidFill>
+                            <a:schemeClr val="dk1"/>
+                          </a:solidFill>
+                          <a:effectLst/>
+                          <a:latin typeface="+mn-lt"/>
+                          <a:ea typeface="+mn-ea"/>
+                          <a:cs typeface="+mn-cs"/>
+                        </a:rPr>
+                        <a:t>생성자와 같은 개념들을 수업 시간에 배우고 간단한 실습만 하다가</a:t>
+                      </a:r>
+                      <a:r>
+                        <a:rPr lang="en-US" altLang="ko-KR" sz="1600" b="0" i="0" kern="1200" dirty="0">
+                          <a:solidFill>
+                            <a:schemeClr val="dk1"/>
+                          </a:solidFill>
+                          <a:effectLst/>
+                          <a:latin typeface="+mn-lt"/>
+                          <a:ea typeface="+mn-ea"/>
+                          <a:cs typeface="+mn-cs"/>
+                        </a:rPr>
+                        <a:t>, </a:t>
+                      </a:r>
+                      <a:r>
+                        <a:rPr lang="ko-KR" altLang="en-US" sz="1600" b="0" i="0" kern="1200" dirty="0">
+                          <a:solidFill>
+                            <a:schemeClr val="dk1"/>
+                          </a:solidFill>
+                          <a:effectLst/>
+                          <a:latin typeface="+mn-lt"/>
+                          <a:ea typeface="+mn-ea"/>
+                          <a:cs typeface="+mn-cs"/>
+                        </a:rPr>
+                        <a:t>이를 조금 더 큰 규모의 프로젝트에 적용하려고 하니 익숙하지 않아서 어디에 무엇을 만들어야 하는지 자주 헷갈렸다</a:t>
+                      </a:r>
+                      <a:r>
+                        <a:rPr lang="en-US" altLang="ko-KR" sz="1600" b="0" i="0" kern="1200" dirty="0">
+                          <a:solidFill>
+                            <a:schemeClr val="dk1"/>
+                          </a:solidFill>
+                          <a:effectLst/>
+                          <a:latin typeface="+mn-lt"/>
+                          <a:ea typeface="+mn-ea"/>
+                          <a:cs typeface="+mn-cs"/>
+                        </a:rPr>
+                        <a:t>. </a:t>
+                      </a:r>
+                      <a:r>
+                        <a:rPr lang="ko-KR" altLang="en-US" sz="1600" b="0" i="0" kern="1200" dirty="0">
+                          <a:solidFill>
+                            <a:schemeClr val="dk1"/>
+                          </a:solidFill>
+                          <a:effectLst/>
+                          <a:latin typeface="+mn-lt"/>
+                          <a:ea typeface="+mn-ea"/>
+                          <a:cs typeface="+mn-cs"/>
+                        </a:rPr>
+                        <a:t>또한 기능 하나를 구현하는 데에도 생각보다 많은 구조가 필요하다는 것을 알게 되었다</a:t>
+                      </a:r>
+                      <a:r>
+                        <a:rPr lang="en-US" altLang="ko-KR" sz="1600" b="0" i="0" kern="1200" dirty="0">
+                          <a:solidFill>
+                            <a:schemeClr val="dk1"/>
+                          </a:solidFill>
+                          <a:effectLst/>
+                          <a:latin typeface="+mn-lt"/>
+                          <a:ea typeface="+mn-ea"/>
+                          <a:cs typeface="+mn-cs"/>
+                        </a:rPr>
+                        <a:t>.</a:t>
+                      </a:r>
+                    </a:p>
+                    <a:p>
+                      <a:r>
+                        <a:rPr lang="ko-KR" altLang="en-US" sz="1600" b="0" i="0" kern="1200" dirty="0">
+                          <a:solidFill>
+                            <a:schemeClr val="dk1"/>
+                          </a:solidFill>
+                          <a:effectLst/>
+                          <a:latin typeface="+mn-lt"/>
+                          <a:ea typeface="+mn-ea"/>
+                          <a:cs typeface="+mn-cs"/>
+                        </a:rPr>
+                        <a:t>특히 </a:t>
+                      </a:r>
+                      <a:r>
+                        <a:rPr lang="en-US" altLang="ko-KR" sz="1600" b="0" i="0" kern="1200" dirty="0">
+                          <a:solidFill>
+                            <a:schemeClr val="dk1"/>
+                          </a:solidFill>
+                          <a:effectLst/>
+                          <a:latin typeface="+mn-lt"/>
+                          <a:ea typeface="+mn-ea"/>
+                          <a:cs typeface="+mn-cs"/>
+                        </a:rPr>
+                        <a:t>ATM </a:t>
+                      </a:r>
+                      <a:r>
+                        <a:rPr lang="ko-KR" altLang="en-US" sz="1600" b="0" i="0" kern="1200" dirty="0">
+                          <a:solidFill>
+                            <a:schemeClr val="dk1"/>
+                          </a:solidFill>
+                          <a:effectLst/>
+                          <a:latin typeface="+mn-lt"/>
+                          <a:ea typeface="+mn-ea"/>
+                          <a:cs typeface="+mn-cs"/>
+                        </a:rPr>
+                        <a:t>기능을 구현하면서 단순히 코드를 작성하는 것이 아니라</a:t>
+                      </a:r>
+                      <a:r>
+                        <a:rPr lang="en-US" altLang="ko-KR" sz="1600" b="0" i="0" kern="1200" dirty="0">
+                          <a:solidFill>
+                            <a:schemeClr val="dk1"/>
+                          </a:solidFill>
+                          <a:effectLst/>
+                          <a:latin typeface="+mn-lt"/>
+                          <a:ea typeface="+mn-ea"/>
+                          <a:cs typeface="+mn-cs"/>
+                        </a:rPr>
+                        <a:t>, </a:t>
+                      </a:r>
+                      <a:r>
+                        <a:rPr lang="ko-KR" altLang="en-US" sz="1600" b="0" i="0" kern="1200" dirty="0">
+                          <a:solidFill>
+                            <a:schemeClr val="dk1"/>
+                          </a:solidFill>
+                          <a:effectLst/>
+                          <a:latin typeface="+mn-lt"/>
+                          <a:ea typeface="+mn-ea"/>
+                          <a:cs typeface="+mn-cs"/>
+                        </a:rPr>
+                        <a:t>객체를 어떻게 나누고 서로 연결해야 하는지가 중요하다는 점을 배울 수 있었다</a:t>
+                      </a:r>
+                      <a:r>
+                        <a:rPr lang="en-US" altLang="ko-KR" sz="1600" b="0" i="0" kern="1200" dirty="0">
+                          <a:solidFill>
+                            <a:schemeClr val="dk1"/>
+                          </a:solidFill>
+                          <a:effectLst/>
+                          <a:latin typeface="+mn-lt"/>
+                          <a:ea typeface="+mn-ea"/>
+                          <a:cs typeface="+mn-cs"/>
+                        </a:rPr>
+                        <a:t>. </a:t>
+                      </a:r>
+                      <a:r>
+                        <a:rPr lang="ko-KR" altLang="en-US" sz="1600" b="0" i="0" kern="1200" dirty="0">
+                          <a:solidFill>
+                            <a:schemeClr val="dk1"/>
+                          </a:solidFill>
+                          <a:effectLst/>
+                          <a:latin typeface="+mn-lt"/>
+                          <a:ea typeface="+mn-ea"/>
+                          <a:cs typeface="+mn-cs"/>
+                        </a:rPr>
+                        <a:t>처음에는 많이 막히고 실수도 있었지만</a:t>
+                      </a:r>
+                      <a:r>
+                        <a:rPr lang="en-US" altLang="ko-KR" sz="1600" b="0" i="0" kern="1200" dirty="0">
+                          <a:solidFill>
+                            <a:schemeClr val="dk1"/>
+                          </a:solidFill>
+                          <a:effectLst/>
+                          <a:latin typeface="+mn-lt"/>
+                          <a:ea typeface="+mn-ea"/>
+                          <a:cs typeface="+mn-cs"/>
+                        </a:rPr>
+                        <a:t>, </a:t>
+                      </a:r>
+                      <a:r>
+                        <a:rPr lang="ko-KR" altLang="en-US" sz="1600" b="0" i="0" kern="1200" dirty="0">
+                          <a:solidFill>
+                            <a:schemeClr val="dk1"/>
+                          </a:solidFill>
+                          <a:effectLst/>
+                          <a:latin typeface="+mn-lt"/>
+                          <a:ea typeface="+mn-ea"/>
+                          <a:cs typeface="+mn-cs"/>
+                        </a:rPr>
+                        <a:t>하나씩 직접 구현해 보면서 자바와 객체지향 구조에 대해 조금 더 이해할 수 있었던 의미 있는 경험이었다</a:t>
+                      </a:r>
+                      <a:r>
+                        <a:rPr lang="en-US" altLang="ko-KR" sz="1600" b="0" i="0" kern="1200" dirty="0">
+                          <a:solidFill>
+                            <a:schemeClr val="dk1"/>
+                          </a:solidFill>
+                          <a:effectLst/>
+                          <a:latin typeface="+mn-lt"/>
+                          <a:ea typeface="+mn-ea"/>
+                          <a:cs typeface="+mn-cs"/>
+                        </a:rPr>
+                        <a:t>.</a:t>
+                      </a:r>
                     </a:p>
                   </a:txBody>
                   <a:tcPr anchor="ctr">
@@ -45570,13 +45925,13 @@
   <p:clrMapOvr>
     <a:masterClrMapping/>
   </p:clrMapOvr>
-  <mc:AlternateContent xmlns:mc="http://schemas.openxmlformats.org/markup-compatibility/2006">
-    <mc:Choice xmlns:p14="http://schemas.microsoft.com/office/powerpoint/2010/main" Requires="p14">
+  <mc:AlternateContent xmlns:mc="http://schemas.openxmlformats.org/markup-compatibility/2006" xmlns:p14="http://schemas.microsoft.com/office/powerpoint/2010/main">
+    <mc:Choice Requires="p14">
       <p:transition spd="med" p14:dur="700">
         <p:fade/>
       </p:transition>
     </mc:Choice>
-    <mc:Fallback>
+    <mc:Fallback xmlns="">
       <p:transition spd="med">
         <p:fade/>
       </p:transition>
